--- a/docs/pptx/auc3/ritu-auc3-linsubhr-ratio-hosp3_10pct.pptx
+++ b/docs/pptx/auc3/ritu-auc3-linsubhr-ratio-hosp3_10pct.pptx
@@ -2443,7 +2443,7 @@
           </p:nvSpPr>
           <p:spPr>
             <a:xfrm>
-              <a:off x="1012387" y="2073503"/>
+              <a:off x="1013326" y="2073503"/>
               <a:ext cx="0" cy="3649639"/>
             </a:xfrm>
             <a:custGeom>
@@ -2486,7 +2486,7 @@
           </p:nvSpPr>
           <p:spPr>
             <a:xfrm>
-              <a:off x="1914572" y="2073503"/>
+              <a:off x="1915271" y="2073503"/>
               <a:ext cx="0" cy="3649639"/>
             </a:xfrm>
             <a:custGeom>
@@ -2529,7 +2529,7 @@
           </p:nvSpPr>
           <p:spPr>
             <a:xfrm>
-              <a:off x="2816756" y="2073503"/>
+              <a:off x="2817216" y="2073503"/>
               <a:ext cx="0" cy="3649639"/>
             </a:xfrm>
             <a:custGeom>
@@ -2572,7 +2572,7 @@
           </p:nvSpPr>
           <p:spPr>
             <a:xfrm>
-              <a:off x="3718941" y="2073503"/>
+              <a:off x="3719160" y="2073503"/>
               <a:ext cx="0" cy="3649639"/>
             </a:xfrm>
             <a:custGeom>
@@ -2615,7 +2615,7 @@
           </p:nvSpPr>
           <p:spPr>
             <a:xfrm>
-              <a:off x="4621125" y="2073503"/>
+              <a:off x="4621105" y="2073503"/>
               <a:ext cx="0" cy="3649639"/>
             </a:xfrm>
             <a:custGeom>
@@ -2658,7 +2658,7 @@
           </p:nvSpPr>
           <p:spPr>
             <a:xfrm>
-              <a:off x="5523310" y="2073503"/>
+              <a:off x="5523050" y="2073503"/>
               <a:ext cx="0" cy="3649639"/>
             </a:xfrm>
             <a:custGeom>
@@ -2701,7 +2701,7 @@
           </p:nvSpPr>
           <p:spPr>
             <a:xfrm>
-              <a:off x="6425495" y="2073503"/>
+              <a:off x="6424995" y="2073503"/>
               <a:ext cx="0" cy="3649639"/>
             </a:xfrm>
             <a:custGeom>
@@ -2744,7 +2744,7 @@
           </p:nvSpPr>
           <p:spPr>
             <a:xfrm>
-              <a:off x="7327679" y="2073503"/>
+              <a:off x="7326940" y="2073503"/>
               <a:ext cx="0" cy="3649639"/>
             </a:xfrm>
             <a:custGeom>
@@ -2787,7 +2787,7 @@
           </p:nvSpPr>
           <p:spPr>
             <a:xfrm>
-              <a:off x="8229864" y="2073503"/>
+              <a:off x="8228885" y="2073503"/>
               <a:ext cx="0" cy="3649639"/>
             </a:xfrm>
             <a:custGeom>
@@ -3045,7 +3045,7 @@
           </p:nvSpPr>
           <p:spPr>
             <a:xfrm>
-              <a:off x="1463479" y="2073503"/>
+              <a:off x="1464298" y="2073503"/>
               <a:ext cx="0" cy="3649639"/>
             </a:xfrm>
             <a:custGeom>
@@ -3088,7 +3088,7 @@
           </p:nvSpPr>
           <p:spPr>
             <a:xfrm>
-              <a:off x="2365664" y="2073503"/>
+              <a:off x="2366243" y="2073503"/>
               <a:ext cx="0" cy="3649639"/>
             </a:xfrm>
             <a:custGeom>
@@ -3131,7 +3131,7 @@
           </p:nvSpPr>
           <p:spPr>
             <a:xfrm>
-              <a:off x="3267849" y="2073503"/>
+              <a:off x="3268188" y="2073503"/>
               <a:ext cx="0" cy="3649639"/>
             </a:xfrm>
             <a:custGeom>
@@ -3174,7 +3174,7 @@
           </p:nvSpPr>
           <p:spPr>
             <a:xfrm>
-              <a:off x="4170033" y="2073503"/>
+              <a:off x="4170133" y="2073503"/>
               <a:ext cx="0" cy="3649639"/>
             </a:xfrm>
             <a:custGeom>
@@ -3217,7 +3217,7 @@
           </p:nvSpPr>
           <p:spPr>
             <a:xfrm>
-              <a:off x="5072218" y="2073503"/>
+              <a:off x="5072078" y="2073503"/>
               <a:ext cx="0" cy="3649639"/>
             </a:xfrm>
             <a:custGeom>
@@ -3260,7 +3260,7 @@
           </p:nvSpPr>
           <p:spPr>
             <a:xfrm>
-              <a:off x="5974402" y="2073503"/>
+              <a:off x="5974022" y="2073503"/>
               <a:ext cx="0" cy="3649639"/>
             </a:xfrm>
             <a:custGeom>
@@ -3303,7 +3303,7 @@
           </p:nvSpPr>
           <p:spPr>
             <a:xfrm>
-              <a:off x="6876587" y="2073503"/>
+              <a:off x="6875967" y="2073503"/>
               <a:ext cx="0" cy="3649639"/>
             </a:xfrm>
             <a:custGeom>
@@ -3346,7 +3346,7 @@
           </p:nvSpPr>
           <p:spPr>
             <a:xfrm>
-              <a:off x="7778772" y="2073503"/>
+              <a:off x="7777912" y="2073503"/>
               <a:ext cx="0" cy="3649639"/>
             </a:xfrm>
             <a:custGeom>
@@ -3389,381 +3389,381 @@
           </p:nvSpPr>
           <p:spPr>
             <a:xfrm>
-              <a:off x="3874625" y="2073503"/>
-              <a:ext cx="4388053" cy="3483746"/>
+              <a:off x="3878370" y="2073503"/>
+              <a:ext cx="4384308" cy="3483746"/>
             </a:xfrm>
             <a:custGeom>
               <a:avLst/>
               <a:pathLst>
-                <a:path w="4388053" h="3483746">
+                <a:path w="4384308" h="3483746">
                   <a:moveTo>
-                    <a:pt x="55829" y="0"/>
+                    <a:pt x="56573" y="0"/>
                   </a:moveTo>
                   <a:lnTo>
-                    <a:pt x="90702" y="724551"/>
-                  </a:lnTo>
-                  <a:lnTo>
-                    <a:pt x="162324" y="1691271"/>
-                  </a:lnTo>
-                  <a:lnTo>
-                    <a:pt x="233947" y="2319288"/>
-                  </a:lnTo>
-                  <a:lnTo>
-                    <a:pt x="305569" y="2714175"/>
-                  </a:lnTo>
-                  <a:lnTo>
-                    <a:pt x="377192" y="2941963"/>
-                  </a:lnTo>
-                  <a:lnTo>
-                    <a:pt x="448814" y="3102327"/>
-                  </a:lnTo>
-                  <a:lnTo>
-                    <a:pt x="520437" y="3215225"/>
-                  </a:lnTo>
-                  <a:lnTo>
-                    <a:pt x="592059" y="3294705"/>
-                  </a:lnTo>
-                  <a:lnTo>
-                    <a:pt x="663682" y="3350660"/>
-                  </a:lnTo>
-                  <a:lnTo>
-                    <a:pt x="735304" y="3390053"/>
-                  </a:lnTo>
-                  <a:lnTo>
-                    <a:pt x="806927" y="3417785"/>
-                  </a:lnTo>
-                  <a:lnTo>
-                    <a:pt x="878550" y="3437309"/>
-                  </a:lnTo>
-                  <a:lnTo>
-                    <a:pt x="950172" y="3451054"/>
-                  </a:lnTo>
-                  <a:lnTo>
-                    <a:pt x="1021795" y="3460731"/>
-                  </a:lnTo>
-                  <a:lnTo>
-                    <a:pt x="1093417" y="3467543"/>
-                  </a:lnTo>
-                  <a:lnTo>
-                    <a:pt x="1165040" y="3472339"/>
-                  </a:lnTo>
-                  <a:lnTo>
-                    <a:pt x="1236662" y="3475716"/>
-                  </a:lnTo>
-                  <a:lnTo>
-                    <a:pt x="1308285" y="3478093"/>
-                  </a:lnTo>
-                  <a:lnTo>
-                    <a:pt x="1379907" y="3479766"/>
-                  </a:lnTo>
-                  <a:lnTo>
-                    <a:pt x="1451530" y="3480944"/>
-                  </a:lnTo>
-                  <a:lnTo>
-                    <a:pt x="1523152" y="3481774"/>
-                  </a:lnTo>
-                  <a:lnTo>
-                    <a:pt x="1594775" y="3482358"/>
-                  </a:lnTo>
-                  <a:lnTo>
-                    <a:pt x="1666397" y="3482769"/>
-                  </a:lnTo>
-                  <a:lnTo>
-                    <a:pt x="1738020" y="3483058"/>
-                  </a:lnTo>
-                  <a:lnTo>
-                    <a:pt x="1809642" y="3483262"/>
-                  </a:lnTo>
-                  <a:lnTo>
-                    <a:pt x="1881265" y="3483405"/>
-                  </a:lnTo>
-                  <a:lnTo>
-                    <a:pt x="1952887" y="3483506"/>
-                  </a:lnTo>
-                  <a:lnTo>
-                    <a:pt x="2024510" y="3483577"/>
-                  </a:lnTo>
-                  <a:lnTo>
-                    <a:pt x="2096132" y="3483627"/>
-                  </a:lnTo>
-                  <a:lnTo>
-                    <a:pt x="2167755" y="3483663"/>
-                  </a:lnTo>
-                  <a:lnTo>
-                    <a:pt x="2239378" y="3483687"/>
-                  </a:lnTo>
-                  <a:lnTo>
-                    <a:pt x="2311000" y="3483705"/>
-                  </a:lnTo>
-                  <a:lnTo>
-                    <a:pt x="2382623" y="3483717"/>
-                  </a:lnTo>
-                  <a:lnTo>
-                    <a:pt x="2454245" y="3483726"/>
-                  </a:lnTo>
-                  <a:lnTo>
-                    <a:pt x="2525868" y="3483732"/>
-                  </a:lnTo>
-                  <a:lnTo>
-                    <a:pt x="2597490" y="3483736"/>
-                  </a:lnTo>
-                  <a:lnTo>
-                    <a:pt x="2669113" y="3483739"/>
-                  </a:lnTo>
-                  <a:lnTo>
-                    <a:pt x="2740735" y="3483741"/>
-                  </a:lnTo>
-                  <a:lnTo>
-                    <a:pt x="2812358" y="3483743"/>
-                  </a:lnTo>
-                  <a:lnTo>
-                    <a:pt x="2883980" y="3483744"/>
-                  </a:lnTo>
-                  <a:lnTo>
-                    <a:pt x="2955603" y="3483745"/>
-                  </a:lnTo>
-                  <a:lnTo>
-                    <a:pt x="3027225" y="3483745"/>
-                  </a:lnTo>
-                  <a:lnTo>
-                    <a:pt x="3098848" y="3483746"/>
-                  </a:lnTo>
-                  <a:lnTo>
-                    <a:pt x="3170470" y="3483746"/>
-                  </a:lnTo>
-                  <a:lnTo>
-                    <a:pt x="3242093" y="3483746"/>
-                  </a:lnTo>
-                  <a:lnTo>
-                    <a:pt x="3313715" y="3483746"/>
-                  </a:lnTo>
-                  <a:lnTo>
-                    <a:pt x="3385338" y="3483746"/>
-                  </a:lnTo>
-                  <a:lnTo>
-                    <a:pt x="3456960" y="3483746"/>
-                  </a:lnTo>
-                  <a:lnTo>
-                    <a:pt x="3528583" y="3483746"/>
-                  </a:lnTo>
-                  <a:lnTo>
-                    <a:pt x="3600206" y="3483746"/>
-                  </a:lnTo>
-                  <a:lnTo>
-                    <a:pt x="3671828" y="3483746"/>
-                  </a:lnTo>
-                  <a:lnTo>
-                    <a:pt x="3743451" y="3483746"/>
-                  </a:lnTo>
-                  <a:lnTo>
-                    <a:pt x="3815073" y="3483746"/>
-                  </a:lnTo>
-                  <a:lnTo>
-                    <a:pt x="3886696" y="3483746"/>
-                  </a:lnTo>
-                  <a:lnTo>
-                    <a:pt x="3958318" y="3483746"/>
-                  </a:lnTo>
-                  <a:lnTo>
-                    <a:pt x="4029941" y="3483746"/>
-                  </a:lnTo>
-                  <a:lnTo>
-                    <a:pt x="4101563" y="3483746"/>
-                  </a:lnTo>
-                  <a:lnTo>
-                    <a:pt x="4173186" y="3483746"/>
-                  </a:lnTo>
-                  <a:lnTo>
-                    <a:pt x="4244808" y="3483746"/>
-                  </a:lnTo>
-                  <a:lnTo>
-                    <a:pt x="4316431" y="3483746"/>
-                  </a:lnTo>
-                  <a:lnTo>
-                    <a:pt x="4388053" y="3483746"/>
-                  </a:lnTo>
-                  <a:lnTo>
-                    <a:pt x="4316431" y="3483746"/>
-                  </a:lnTo>
-                  <a:lnTo>
-                    <a:pt x="4244808" y="3483746"/>
-                  </a:lnTo>
-                  <a:lnTo>
-                    <a:pt x="4173186" y="3483746"/>
-                  </a:lnTo>
-                  <a:lnTo>
-                    <a:pt x="4101563" y="3483746"/>
-                  </a:lnTo>
-                  <a:lnTo>
-                    <a:pt x="4029941" y="3483746"/>
-                  </a:lnTo>
-                  <a:lnTo>
-                    <a:pt x="3958318" y="3483746"/>
-                  </a:lnTo>
-                  <a:lnTo>
-                    <a:pt x="3886696" y="3483746"/>
-                  </a:lnTo>
-                  <a:lnTo>
-                    <a:pt x="3815073" y="3483746"/>
-                  </a:lnTo>
-                  <a:lnTo>
-                    <a:pt x="3743451" y="3483746"/>
-                  </a:lnTo>
-                  <a:lnTo>
-                    <a:pt x="3671828" y="3483746"/>
-                  </a:lnTo>
-                  <a:lnTo>
-                    <a:pt x="3600206" y="3483746"/>
-                  </a:lnTo>
-                  <a:lnTo>
-                    <a:pt x="3528583" y="3483746"/>
-                  </a:lnTo>
-                  <a:lnTo>
-                    <a:pt x="3456960" y="3483746"/>
-                  </a:lnTo>
-                  <a:lnTo>
-                    <a:pt x="3385338" y="3483746"/>
-                  </a:lnTo>
-                  <a:lnTo>
-                    <a:pt x="3313715" y="3483746"/>
-                  </a:lnTo>
-                  <a:lnTo>
-                    <a:pt x="3242093" y="3483746"/>
-                  </a:lnTo>
-                  <a:lnTo>
-                    <a:pt x="3170470" y="3483746"/>
-                  </a:lnTo>
-                  <a:lnTo>
-                    <a:pt x="3098848" y="3483746"/>
-                  </a:lnTo>
-                  <a:lnTo>
-                    <a:pt x="3027225" y="3483746"/>
-                  </a:lnTo>
-                  <a:lnTo>
-                    <a:pt x="2955603" y="3483746"/>
-                  </a:lnTo>
-                  <a:lnTo>
-                    <a:pt x="2883980" y="3483746"/>
-                  </a:lnTo>
-                  <a:lnTo>
-                    <a:pt x="2812358" y="3483746"/>
-                  </a:lnTo>
-                  <a:lnTo>
-                    <a:pt x="2740735" y="3483746"/>
-                  </a:lnTo>
-                  <a:lnTo>
-                    <a:pt x="2669113" y="3483746"/>
-                  </a:lnTo>
-                  <a:lnTo>
-                    <a:pt x="2597490" y="3483746"/>
-                  </a:lnTo>
-                  <a:lnTo>
-                    <a:pt x="2525868" y="3483745"/>
-                  </a:lnTo>
-                  <a:lnTo>
-                    <a:pt x="2454245" y="3483745"/>
-                  </a:lnTo>
-                  <a:lnTo>
-                    <a:pt x="2382623" y="3483744"/>
-                  </a:lnTo>
-                  <a:lnTo>
-                    <a:pt x="2311000" y="3483742"/>
-                  </a:lnTo>
-                  <a:lnTo>
-                    <a:pt x="2239378" y="3483740"/>
-                  </a:lnTo>
-                  <a:lnTo>
-                    <a:pt x="2167755" y="3483736"/>
-                  </a:lnTo>
-                  <a:lnTo>
-                    <a:pt x="2096132" y="3483731"/>
-                  </a:lnTo>
-                  <a:lnTo>
-                    <a:pt x="2024510" y="3483722"/>
-                  </a:lnTo>
-                  <a:lnTo>
-                    <a:pt x="1952887" y="3483709"/>
-                  </a:lnTo>
-                  <a:lnTo>
-                    <a:pt x="1881265" y="3483689"/>
-                  </a:lnTo>
-                  <a:lnTo>
-                    <a:pt x="1809642" y="3483658"/>
-                  </a:lnTo>
-                  <a:lnTo>
-                    <a:pt x="1738020" y="3483611"/>
-                  </a:lnTo>
-                  <a:lnTo>
-                    <a:pt x="1666397" y="3483538"/>
-                  </a:lnTo>
-                  <a:lnTo>
-                    <a:pt x="1594775" y="3483425"/>
-                  </a:lnTo>
-                  <a:lnTo>
-                    <a:pt x="1523152" y="3483252"/>
-                  </a:lnTo>
-                  <a:lnTo>
-                    <a:pt x="1451530" y="3482985"/>
-                  </a:lnTo>
-                  <a:lnTo>
-                    <a:pt x="1379907" y="3482575"/>
-                  </a:lnTo>
-                  <a:lnTo>
-                    <a:pt x="1308285" y="3481943"/>
-                  </a:lnTo>
-                  <a:lnTo>
-                    <a:pt x="1236662" y="3480970"/>
-                  </a:lnTo>
-                  <a:lnTo>
-                    <a:pt x="1165040" y="3479472"/>
-                  </a:lnTo>
-                  <a:lnTo>
-                    <a:pt x="1093417" y="3477167"/>
-                  </a:lnTo>
-                  <a:lnTo>
-                    <a:pt x="1021795" y="3473619"/>
-                  </a:lnTo>
-                  <a:lnTo>
-                    <a:pt x="950172" y="3468157"/>
-                  </a:lnTo>
-                  <a:lnTo>
-                    <a:pt x="878550" y="3459749"/>
-                  </a:lnTo>
-                  <a:lnTo>
-                    <a:pt x="806927" y="3446807"/>
-                  </a:lnTo>
-                  <a:lnTo>
-                    <a:pt x="735304" y="3426885"/>
-                  </a:lnTo>
-                  <a:lnTo>
-                    <a:pt x="663682" y="3396218"/>
-                  </a:lnTo>
-                  <a:lnTo>
-                    <a:pt x="592059" y="3349012"/>
-                  </a:lnTo>
-                  <a:lnTo>
-                    <a:pt x="520437" y="3276347"/>
-                  </a:lnTo>
-                  <a:lnTo>
-                    <a:pt x="448814" y="3164492"/>
-                  </a:lnTo>
-                  <a:lnTo>
-                    <a:pt x="377192" y="2992312"/>
-                  </a:lnTo>
-                  <a:lnTo>
-                    <a:pt x="305569" y="2727271"/>
-                  </a:lnTo>
-                  <a:lnTo>
-                    <a:pt x="233947" y="2390616"/>
-                  </a:lnTo>
-                  <a:lnTo>
-                    <a:pt x="162324" y="1931020"/>
-                  </a:lnTo>
-                  <a:lnTo>
-                    <a:pt x="90702" y="1278191"/>
-                  </a:lnTo>
-                  <a:lnTo>
-                    <a:pt x="19079" y="350887"/>
+                    <a:pt x="86957" y="646601"/>
+                  </a:lnTo>
+                  <a:lnTo>
+                    <a:pt x="158579" y="1638129"/>
+                  </a:lnTo>
+                  <a:lnTo>
+                    <a:pt x="230202" y="2283137"/>
+                  </a:lnTo>
+                  <a:lnTo>
+                    <a:pt x="301824" y="2693885"/>
+                  </a:lnTo>
+                  <a:lnTo>
+                    <a:pt x="373447" y="2926891"/>
+                  </a:lnTo>
+                  <a:lnTo>
+                    <a:pt x="445069" y="3091161"/>
+                  </a:lnTo>
+                  <a:lnTo>
+                    <a:pt x="516692" y="3206972"/>
+                  </a:lnTo>
+                  <a:lnTo>
+                    <a:pt x="588314" y="3288620"/>
+                  </a:lnTo>
+                  <a:lnTo>
+                    <a:pt x="659937" y="3346181"/>
+                  </a:lnTo>
+                  <a:lnTo>
+                    <a:pt x="731559" y="3386762"/>
+                  </a:lnTo>
+                  <a:lnTo>
+                    <a:pt x="803182" y="3415372"/>
+                  </a:lnTo>
+                  <a:lnTo>
+                    <a:pt x="874804" y="3435542"/>
+                  </a:lnTo>
+                  <a:lnTo>
+                    <a:pt x="946427" y="3449762"/>
+                  </a:lnTo>
+                  <a:lnTo>
+                    <a:pt x="1018050" y="3459788"/>
+                  </a:lnTo>
+                  <a:lnTo>
+                    <a:pt x="1089672" y="3466855"/>
+                  </a:lnTo>
+                  <a:lnTo>
+                    <a:pt x="1161295" y="3471838"/>
+                  </a:lnTo>
+                  <a:lnTo>
+                    <a:pt x="1232917" y="3475351"/>
+                  </a:lnTo>
+                  <a:lnTo>
+                    <a:pt x="1304540" y="3477828"/>
+                  </a:lnTo>
+                  <a:lnTo>
+                    <a:pt x="1376162" y="3479574"/>
+                  </a:lnTo>
+                  <a:lnTo>
+                    <a:pt x="1447785" y="3480805"/>
+                  </a:lnTo>
+                  <a:lnTo>
+                    <a:pt x="1519407" y="3481672"/>
+                  </a:lnTo>
+                  <a:lnTo>
+                    <a:pt x="1591030" y="3482284"/>
+                  </a:lnTo>
+                  <a:lnTo>
+                    <a:pt x="1662652" y="3482716"/>
+                  </a:lnTo>
+                  <a:lnTo>
+                    <a:pt x="1734275" y="3483020"/>
+                  </a:lnTo>
+                  <a:lnTo>
+                    <a:pt x="1805897" y="3483234"/>
+                  </a:lnTo>
+                  <a:lnTo>
+                    <a:pt x="1877520" y="3483385"/>
+                  </a:lnTo>
+                  <a:lnTo>
+                    <a:pt x="1949142" y="3483492"/>
+                  </a:lnTo>
+                  <a:lnTo>
+                    <a:pt x="2020765" y="3483567"/>
+                  </a:lnTo>
+                  <a:lnTo>
+                    <a:pt x="2092387" y="3483620"/>
+                  </a:lnTo>
+                  <a:lnTo>
+                    <a:pt x="2164010" y="3483657"/>
+                  </a:lnTo>
+                  <a:lnTo>
+                    <a:pt x="2235632" y="3483683"/>
+                  </a:lnTo>
+                  <a:lnTo>
+                    <a:pt x="2307255" y="3483702"/>
+                  </a:lnTo>
+                  <a:lnTo>
+                    <a:pt x="2378878" y="3483715"/>
+                  </a:lnTo>
+                  <a:lnTo>
+                    <a:pt x="2450500" y="3483724"/>
+                  </a:lnTo>
+                  <a:lnTo>
+                    <a:pt x="2522123" y="3483731"/>
+                  </a:lnTo>
+                  <a:lnTo>
+                    <a:pt x="2593745" y="3483735"/>
+                  </a:lnTo>
+                  <a:lnTo>
+                    <a:pt x="2665368" y="3483739"/>
+                  </a:lnTo>
+                  <a:lnTo>
+                    <a:pt x="2736990" y="3483741"/>
+                  </a:lnTo>
+                  <a:lnTo>
+                    <a:pt x="2808613" y="3483743"/>
+                  </a:lnTo>
+                  <a:lnTo>
+                    <a:pt x="2880235" y="3483744"/>
+                  </a:lnTo>
+                  <a:lnTo>
+                    <a:pt x="2951858" y="3483744"/>
+                  </a:lnTo>
+                  <a:lnTo>
+                    <a:pt x="3023480" y="3483745"/>
+                  </a:lnTo>
+                  <a:lnTo>
+                    <a:pt x="3095103" y="3483745"/>
+                  </a:lnTo>
+                  <a:lnTo>
+                    <a:pt x="3166725" y="3483746"/>
+                  </a:lnTo>
+                  <a:lnTo>
+                    <a:pt x="3238348" y="3483746"/>
+                  </a:lnTo>
+                  <a:lnTo>
+                    <a:pt x="3309970" y="3483746"/>
+                  </a:lnTo>
+                  <a:lnTo>
+                    <a:pt x="3381593" y="3483746"/>
+                  </a:lnTo>
+                  <a:lnTo>
+                    <a:pt x="3453215" y="3483746"/>
+                  </a:lnTo>
+                  <a:lnTo>
+                    <a:pt x="3524838" y="3483746"/>
+                  </a:lnTo>
+                  <a:lnTo>
+                    <a:pt x="3596460" y="3483746"/>
+                  </a:lnTo>
+                  <a:lnTo>
+                    <a:pt x="3668083" y="3483746"/>
+                  </a:lnTo>
+                  <a:lnTo>
+                    <a:pt x="3739706" y="3483746"/>
+                  </a:lnTo>
+                  <a:lnTo>
+                    <a:pt x="3811328" y="3483746"/>
+                  </a:lnTo>
+                  <a:lnTo>
+                    <a:pt x="3882951" y="3483746"/>
+                  </a:lnTo>
+                  <a:lnTo>
+                    <a:pt x="3954573" y="3483746"/>
+                  </a:lnTo>
+                  <a:lnTo>
+                    <a:pt x="4026196" y="3483746"/>
+                  </a:lnTo>
+                  <a:lnTo>
+                    <a:pt x="4097818" y="3483746"/>
+                  </a:lnTo>
+                  <a:lnTo>
+                    <a:pt x="4169441" y="3483746"/>
+                  </a:lnTo>
+                  <a:lnTo>
+                    <a:pt x="4241063" y="3483746"/>
+                  </a:lnTo>
+                  <a:lnTo>
+                    <a:pt x="4312686" y="3483746"/>
+                  </a:lnTo>
+                  <a:lnTo>
+                    <a:pt x="4384308" y="3483746"/>
+                  </a:lnTo>
+                  <a:lnTo>
+                    <a:pt x="4312686" y="3483746"/>
+                  </a:lnTo>
+                  <a:lnTo>
+                    <a:pt x="4241063" y="3483746"/>
+                  </a:lnTo>
+                  <a:lnTo>
+                    <a:pt x="4169441" y="3483746"/>
+                  </a:lnTo>
+                  <a:lnTo>
+                    <a:pt x="4097818" y="3483746"/>
+                  </a:lnTo>
+                  <a:lnTo>
+                    <a:pt x="4026196" y="3483746"/>
+                  </a:lnTo>
+                  <a:lnTo>
+                    <a:pt x="3954573" y="3483746"/>
+                  </a:lnTo>
+                  <a:lnTo>
+                    <a:pt x="3882951" y="3483746"/>
+                  </a:lnTo>
+                  <a:lnTo>
+                    <a:pt x="3811328" y="3483746"/>
+                  </a:lnTo>
+                  <a:lnTo>
+                    <a:pt x="3739706" y="3483746"/>
+                  </a:lnTo>
+                  <a:lnTo>
+                    <a:pt x="3668083" y="3483746"/>
+                  </a:lnTo>
+                  <a:lnTo>
+                    <a:pt x="3596460" y="3483746"/>
+                  </a:lnTo>
+                  <a:lnTo>
+                    <a:pt x="3524838" y="3483746"/>
+                  </a:lnTo>
+                  <a:lnTo>
+                    <a:pt x="3453215" y="3483746"/>
+                  </a:lnTo>
+                  <a:lnTo>
+                    <a:pt x="3381593" y="3483746"/>
+                  </a:lnTo>
+                  <a:lnTo>
+                    <a:pt x="3309970" y="3483746"/>
+                  </a:lnTo>
+                  <a:lnTo>
+                    <a:pt x="3238348" y="3483746"/>
+                  </a:lnTo>
+                  <a:lnTo>
+                    <a:pt x="3166725" y="3483746"/>
+                  </a:lnTo>
+                  <a:lnTo>
+                    <a:pt x="3095103" y="3483746"/>
+                  </a:lnTo>
+                  <a:lnTo>
+                    <a:pt x="3023480" y="3483746"/>
+                  </a:lnTo>
+                  <a:lnTo>
+                    <a:pt x="2951858" y="3483746"/>
+                  </a:lnTo>
+                  <a:lnTo>
+                    <a:pt x="2880235" y="3483746"/>
+                  </a:lnTo>
+                  <a:lnTo>
+                    <a:pt x="2808613" y="3483746"/>
+                  </a:lnTo>
+                  <a:lnTo>
+                    <a:pt x="2736990" y="3483746"/>
+                  </a:lnTo>
+                  <a:lnTo>
+                    <a:pt x="2665368" y="3483746"/>
+                  </a:lnTo>
+                  <a:lnTo>
+                    <a:pt x="2593745" y="3483746"/>
+                  </a:lnTo>
+                  <a:lnTo>
+                    <a:pt x="2522123" y="3483745"/>
+                  </a:lnTo>
+                  <a:lnTo>
+                    <a:pt x="2450500" y="3483744"/>
+                  </a:lnTo>
+                  <a:lnTo>
+                    <a:pt x="2378878" y="3483743"/>
+                  </a:lnTo>
+                  <a:lnTo>
+                    <a:pt x="2307255" y="3483742"/>
+                  </a:lnTo>
+                  <a:lnTo>
+                    <a:pt x="2235632" y="3483739"/>
+                  </a:lnTo>
+                  <a:lnTo>
+                    <a:pt x="2164010" y="3483736"/>
+                  </a:lnTo>
+                  <a:lnTo>
+                    <a:pt x="2092387" y="3483730"/>
+                  </a:lnTo>
+                  <a:lnTo>
+                    <a:pt x="2020765" y="3483721"/>
+                  </a:lnTo>
+                  <a:lnTo>
+                    <a:pt x="1949142" y="3483707"/>
+                  </a:lnTo>
+                  <a:lnTo>
+                    <a:pt x="1877520" y="3483686"/>
+                  </a:lnTo>
+                  <a:lnTo>
+                    <a:pt x="1805897" y="3483653"/>
+                  </a:lnTo>
+                  <a:lnTo>
+                    <a:pt x="1734275" y="3483603"/>
+                  </a:lnTo>
+                  <a:lnTo>
+                    <a:pt x="1662652" y="3483525"/>
+                  </a:lnTo>
+                  <a:lnTo>
+                    <a:pt x="1591030" y="3483407"/>
+                  </a:lnTo>
+                  <a:lnTo>
+                    <a:pt x="1519407" y="3483224"/>
+                  </a:lnTo>
+                  <a:lnTo>
+                    <a:pt x="1447785" y="3482943"/>
+                  </a:lnTo>
+                  <a:lnTo>
+                    <a:pt x="1376162" y="3482512"/>
+                  </a:lnTo>
+                  <a:lnTo>
+                    <a:pt x="1304540" y="3481848"/>
+                  </a:lnTo>
+                  <a:lnTo>
+                    <a:pt x="1232917" y="3480829"/>
+                  </a:lnTo>
+                  <a:lnTo>
+                    <a:pt x="1161295" y="3479261"/>
+                  </a:lnTo>
+                  <a:lnTo>
+                    <a:pt x="1089672" y="3476852"/>
+                  </a:lnTo>
+                  <a:lnTo>
+                    <a:pt x="1018050" y="3473147"/>
+                  </a:lnTo>
+                  <a:lnTo>
+                    <a:pt x="946427" y="3467453"/>
+                  </a:lnTo>
+                  <a:lnTo>
+                    <a:pt x="874804" y="3458700"/>
+                  </a:lnTo>
+                  <a:lnTo>
+                    <a:pt x="803182" y="3445244"/>
+                  </a:lnTo>
+                  <a:lnTo>
+                    <a:pt x="731559" y="3424560"/>
+                  </a:lnTo>
+                  <a:lnTo>
+                    <a:pt x="659937" y="3392763"/>
+                  </a:lnTo>
+                  <a:lnTo>
+                    <a:pt x="588314" y="3343884"/>
+                  </a:lnTo>
+                  <a:lnTo>
+                    <a:pt x="516692" y="3268745"/>
+                  </a:lnTo>
+                  <a:lnTo>
+                    <a:pt x="445069" y="3153238"/>
+                  </a:lnTo>
+                  <a:lnTo>
+                    <a:pt x="373447" y="2975678"/>
+                  </a:lnTo>
+                  <a:lnTo>
+                    <a:pt x="301824" y="2702727"/>
+                  </a:lnTo>
+                  <a:lnTo>
+                    <a:pt x="230202" y="2363382"/>
+                  </a:lnTo>
+                  <a:lnTo>
+                    <a:pt x="158579" y="1894587"/>
+                  </a:lnTo>
+                  <a:lnTo>
+                    <a:pt x="86957" y="1229632"/>
+                  </a:lnTo>
+                  <a:lnTo>
+                    <a:pt x="15334" y="286439"/>
                   </a:lnTo>
                   <a:lnTo>
                     <a:pt x="0" y="0"/>
@@ -3792,198 +3792,198 @@
           </p:nvSpPr>
           <p:spPr>
             <a:xfrm>
-              <a:off x="3930454" y="2073503"/>
-              <a:ext cx="4332224" cy="3483746"/>
+              <a:off x="3934944" y="2073503"/>
+              <a:ext cx="4327735" cy="3483746"/>
             </a:xfrm>
             <a:custGeom>
               <a:avLst/>
               <a:pathLst>
-                <a:path w="4332224" h="3483746">
+                <a:path w="4327735" h="3483746">
                   <a:moveTo>
                     <a:pt x="0" y="0"/>
                   </a:moveTo>
                   <a:lnTo>
-                    <a:pt x="34872" y="724551"/>
-                  </a:lnTo>
-                  <a:lnTo>
-                    <a:pt x="106495" y="1691271"/>
-                  </a:lnTo>
-                  <a:lnTo>
-                    <a:pt x="178118" y="2319288"/>
-                  </a:lnTo>
-                  <a:lnTo>
-                    <a:pt x="249740" y="2714175"/>
-                  </a:lnTo>
-                  <a:lnTo>
-                    <a:pt x="321363" y="2941963"/>
-                  </a:lnTo>
-                  <a:lnTo>
-                    <a:pt x="392985" y="3102327"/>
-                  </a:lnTo>
-                  <a:lnTo>
-                    <a:pt x="464608" y="3215225"/>
-                  </a:lnTo>
-                  <a:lnTo>
-                    <a:pt x="536230" y="3294705"/>
-                  </a:lnTo>
-                  <a:lnTo>
-                    <a:pt x="607853" y="3350660"/>
-                  </a:lnTo>
-                  <a:lnTo>
-                    <a:pt x="679475" y="3390053"/>
-                  </a:lnTo>
-                  <a:lnTo>
-                    <a:pt x="751098" y="3417785"/>
-                  </a:lnTo>
-                  <a:lnTo>
-                    <a:pt x="822720" y="3437309"/>
-                  </a:lnTo>
-                  <a:lnTo>
-                    <a:pt x="894343" y="3451054"/>
-                  </a:lnTo>
-                  <a:lnTo>
-                    <a:pt x="965965" y="3460731"/>
-                  </a:lnTo>
-                  <a:lnTo>
-                    <a:pt x="1037588" y="3467543"/>
-                  </a:lnTo>
-                  <a:lnTo>
-                    <a:pt x="1109210" y="3472339"/>
-                  </a:lnTo>
-                  <a:lnTo>
-                    <a:pt x="1180833" y="3475716"/>
-                  </a:lnTo>
-                  <a:lnTo>
-                    <a:pt x="1252455" y="3478093"/>
-                  </a:lnTo>
-                  <a:lnTo>
-                    <a:pt x="1324078" y="3479766"/>
-                  </a:lnTo>
-                  <a:lnTo>
-                    <a:pt x="1395700" y="3480944"/>
-                  </a:lnTo>
-                  <a:lnTo>
-                    <a:pt x="1467323" y="3481774"/>
-                  </a:lnTo>
-                  <a:lnTo>
-                    <a:pt x="1538946" y="3482358"/>
-                  </a:lnTo>
-                  <a:lnTo>
-                    <a:pt x="1610568" y="3482769"/>
-                  </a:lnTo>
-                  <a:lnTo>
-                    <a:pt x="1682191" y="3483058"/>
-                  </a:lnTo>
-                  <a:lnTo>
-                    <a:pt x="1753813" y="3483262"/>
-                  </a:lnTo>
-                  <a:lnTo>
-                    <a:pt x="1825436" y="3483405"/>
-                  </a:lnTo>
-                  <a:lnTo>
-                    <a:pt x="1897058" y="3483506"/>
-                  </a:lnTo>
-                  <a:lnTo>
-                    <a:pt x="1968681" y="3483577"/>
-                  </a:lnTo>
-                  <a:lnTo>
-                    <a:pt x="2040303" y="3483627"/>
-                  </a:lnTo>
-                  <a:lnTo>
-                    <a:pt x="2111926" y="3483663"/>
-                  </a:lnTo>
-                  <a:lnTo>
-                    <a:pt x="2183548" y="3483687"/>
-                  </a:lnTo>
-                  <a:lnTo>
-                    <a:pt x="2255171" y="3483705"/>
-                  </a:lnTo>
-                  <a:lnTo>
-                    <a:pt x="2326793" y="3483717"/>
-                  </a:lnTo>
-                  <a:lnTo>
-                    <a:pt x="2398416" y="3483726"/>
-                  </a:lnTo>
-                  <a:lnTo>
-                    <a:pt x="2470038" y="3483732"/>
-                  </a:lnTo>
-                  <a:lnTo>
-                    <a:pt x="2541661" y="3483736"/>
-                  </a:lnTo>
-                  <a:lnTo>
-                    <a:pt x="2613283" y="3483739"/>
-                  </a:lnTo>
-                  <a:lnTo>
-                    <a:pt x="2684906" y="3483741"/>
-                  </a:lnTo>
-                  <a:lnTo>
-                    <a:pt x="2756528" y="3483743"/>
-                  </a:lnTo>
-                  <a:lnTo>
-                    <a:pt x="2828151" y="3483744"/>
-                  </a:lnTo>
-                  <a:lnTo>
-                    <a:pt x="2899774" y="3483745"/>
-                  </a:lnTo>
-                  <a:lnTo>
-                    <a:pt x="2971396" y="3483745"/>
-                  </a:lnTo>
-                  <a:lnTo>
-                    <a:pt x="3043019" y="3483746"/>
-                  </a:lnTo>
-                  <a:lnTo>
-                    <a:pt x="3114641" y="3483746"/>
-                  </a:lnTo>
-                  <a:lnTo>
-                    <a:pt x="3186264" y="3483746"/>
-                  </a:lnTo>
-                  <a:lnTo>
-                    <a:pt x="3257886" y="3483746"/>
-                  </a:lnTo>
-                  <a:lnTo>
-                    <a:pt x="3329509" y="3483746"/>
-                  </a:lnTo>
-                  <a:lnTo>
-                    <a:pt x="3401131" y="3483746"/>
-                  </a:lnTo>
-                  <a:lnTo>
-                    <a:pt x="3472754" y="3483746"/>
-                  </a:lnTo>
-                  <a:lnTo>
-                    <a:pt x="3544376" y="3483746"/>
-                  </a:lnTo>
-                  <a:lnTo>
-                    <a:pt x="3615999" y="3483746"/>
-                  </a:lnTo>
-                  <a:lnTo>
-                    <a:pt x="3687621" y="3483746"/>
-                  </a:lnTo>
-                  <a:lnTo>
-                    <a:pt x="3759244" y="3483746"/>
-                  </a:lnTo>
-                  <a:lnTo>
-                    <a:pt x="3830866" y="3483746"/>
-                  </a:lnTo>
-                  <a:lnTo>
-                    <a:pt x="3902489" y="3483746"/>
-                  </a:lnTo>
-                  <a:lnTo>
-                    <a:pt x="3974111" y="3483746"/>
-                  </a:lnTo>
-                  <a:lnTo>
-                    <a:pt x="4045734" y="3483746"/>
-                  </a:lnTo>
-                  <a:lnTo>
-                    <a:pt x="4117356" y="3483746"/>
-                  </a:lnTo>
-                  <a:lnTo>
-                    <a:pt x="4188979" y="3483746"/>
-                  </a:lnTo>
-                  <a:lnTo>
-                    <a:pt x="4260602" y="3483746"/>
-                  </a:lnTo>
-                  <a:lnTo>
-                    <a:pt x="4332224" y="3483746"/>
+                    <a:pt x="30383" y="646601"/>
+                  </a:lnTo>
+                  <a:lnTo>
+                    <a:pt x="102006" y="1638129"/>
+                  </a:lnTo>
+                  <a:lnTo>
+                    <a:pt x="173628" y="2283137"/>
+                  </a:lnTo>
+                  <a:lnTo>
+                    <a:pt x="245251" y="2693885"/>
+                  </a:lnTo>
+                  <a:lnTo>
+                    <a:pt x="316873" y="2926891"/>
+                  </a:lnTo>
+                  <a:lnTo>
+                    <a:pt x="388496" y="3091161"/>
+                  </a:lnTo>
+                  <a:lnTo>
+                    <a:pt x="460118" y="3206972"/>
+                  </a:lnTo>
+                  <a:lnTo>
+                    <a:pt x="531741" y="3288620"/>
+                  </a:lnTo>
+                  <a:lnTo>
+                    <a:pt x="603363" y="3346181"/>
+                  </a:lnTo>
+                  <a:lnTo>
+                    <a:pt x="674986" y="3386762"/>
+                  </a:lnTo>
+                  <a:lnTo>
+                    <a:pt x="746609" y="3415372"/>
+                  </a:lnTo>
+                  <a:lnTo>
+                    <a:pt x="818231" y="3435542"/>
+                  </a:lnTo>
+                  <a:lnTo>
+                    <a:pt x="889854" y="3449762"/>
+                  </a:lnTo>
+                  <a:lnTo>
+                    <a:pt x="961476" y="3459788"/>
+                  </a:lnTo>
+                  <a:lnTo>
+                    <a:pt x="1033099" y="3466855"/>
+                  </a:lnTo>
+                  <a:lnTo>
+                    <a:pt x="1104721" y="3471838"/>
+                  </a:lnTo>
+                  <a:lnTo>
+                    <a:pt x="1176344" y="3475351"/>
+                  </a:lnTo>
+                  <a:lnTo>
+                    <a:pt x="1247966" y="3477828"/>
+                  </a:lnTo>
+                  <a:lnTo>
+                    <a:pt x="1319589" y="3479574"/>
+                  </a:lnTo>
+                  <a:lnTo>
+                    <a:pt x="1391211" y="3480805"/>
+                  </a:lnTo>
+                  <a:lnTo>
+                    <a:pt x="1462834" y="3481672"/>
+                  </a:lnTo>
+                  <a:lnTo>
+                    <a:pt x="1534456" y="3482284"/>
+                  </a:lnTo>
+                  <a:lnTo>
+                    <a:pt x="1606079" y="3482716"/>
+                  </a:lnTo>
+                  <a:lnTo>
+                    <a:pt x="1677701" y="3483020"/>
+                  </a:lnTo>
+                  <a:lnTo>
+                    <a:pt x="1749324" y="3483234"/>
+                  </a:lnTo>
+                  <a:lnTo>
+                    <a:pt x="1820946" y="3483385"/>
+                  </a:lnTo>
+                  <a:lnTo>
+                    <a:pt x="1892569" y="3483492"/>
+                  </a:lnTo>
+                  <a:lnTo>
+                    <a:pt x="1964191" y="3483567"/>
+                  </a:lnTo>
+                  <a:lnTo>
+                    <a:pt x="2035814" y="3483620"/>
+                  </a:lnTo>
+                  <a:lnTo>
+                    <a:pt x="2107437" y="3483657"/>
+                  </a:lnTo>
+                  <a:lnTo>
+                    <a:pt x="2179059" y="3483683"/>
+                  </a:lnTo>
+                  <a:lnTo>
+                    <a:pt x="2250682" y="3483702"/>
+                  </a:lnTo>
+                  <a:lnTo>
+                    <a:pt x="2322304" y="3483715"/>
+                  </a:lnTo>
+                  <a:lnTo>
+                    <a:pt x="2393927" y="3483724"/>
+                  </a:lnTo>
+                  <a:lnTo>
+                    <a:pt x="2465549" y="3483731"/>
+                  </a:lnTo>
+                  <a:lnTo>
+                    <a:pt x="2537172" y="3483735"/>
+                  </a:lnTo>
+                  <a:lnTo>
+                    <a:pt x="2608794" y="3483739"/>
+                  </a:lnTo>
+                  <a:lnTo>
+                    <a:pt x="2680417" y="3483741"/>
+                  </a:lnTo>
+                  <a:lnTo>
+                    <a:pt x="2752039" y="3483743"/>
+                  </a:lnTo>
+                  <a:lnTo>
+                    <a:pt x="2823662" y="3483744"/>
+                  </a:lnTo>
+                  <a:lnTo>
+                    <a:pt x="2895284" y="3483744"/>
+                  </a:lnTo>
+                  <a:lnTo>
+                    <a:pt x="2966907" y="3483745"/>
+                  </a:lnTo>
+                  <a:lnTo>
+                    <a:pt x="3038529" y="3483745"/>
+                  </a:lnTo>
+                  <a:lnTo>
+                    <a:pt x="3110152" y="3483746"/>
+                  </a:lnTo>
+                  <a:lnTo>
+                    <a:pt x="3181774" y="3483746"/>
+                  </a:lnTo>
+                  <a:lnTo>
+                    <a:pt x="3253397" y="3483746"/>
+                  </a:lnTo>
+                  <a:lnTo>
+                    <a:pt x="3325019" y="3483746"/>
+                  </a:lnTo>
+                  <a:lnTo>
+                    <a:pt x="3396642" y="3483746"/>
+                  </a:lnTo>
+                  <a:lnTo>
+                    <a:pt x="3468265" y="3483746"/>
+                  </a:lnTo>
+                  <a:lnTo>
+                    <a:pt x="3539887" y="3483746"/>
+                  </a:lnTo>
+                  <a:lnTo>
+                    <a:pt x="3611510" y="3483746"/>
+                  </a:lnTo>
+                  <a:lnTo>
+                    <a:pt x="3683132" y="3483746"/>
+                  </a:lnTo>
+                  <a:lnTo>
+                    <a:pt x="3754755" y="3483746"/>
+                  </a:lnTo>
+                  <a:lnTo>
+                    <a:pt x="3826377" y="3483746"/>
+                  </a:lnTo>
+                  <a:lnTo>
+                    <a:pt x="3898000" y="3483746"/>
+                  </a:lnTo>
+                  <a:lnTo>
+                    <a:pt x="3969622" y="3483746"/>
+                  </a:lnTo>
+                  <a:lnTo>
+                    <a:pt x="4041245" y="3483746"/>
+                  </a:lnTo>
+                  <a:lnTo>
+                    <a:pt x="4112867" y="3483746"/>
+                  </a:lnTo>
+                  <a:lnTo>
+                    <a:pt x="4184490" y="3483746"/>
+                  </a:lnTo>
+                  <a:lnTo>
+                    <a:pt x="4256112" y="3483746"/>
+                  </a:lnTo>
+                  <a:lnTo>
+                    <a:pt x="4327735" y="3483746"/>
                   </a:lnTo>
                 </a:path>
               </a:pathLst>
@@ -4003,198 +4003,198 @@
           </p:nvSpPr>
           <p:spPr>
             <a:xfrm>
-              <a:off x="3874625" y="2073503"/>
-              <a:ext cx="4388053" cy="3483746"/>
+              <a:off x="3878370" y="2073503"/>
+              <a:ext cx="4384308" cy="3483746"/>
             </a:xfrm>
             <a:custGeom>
               <a:avLst/>
               <a:pathLst>
-                <a:path w="4388053" h="3483746">
+                <a:path w="4384308" h="3483746">
                   <a:moveTo>
-                    <a:pt x="4388053" y="3483746"/>
+                    <a:pt x="4384308" y="3483746"/>
                   </a:moveTo>
                   <a:lnTo>
-                    <a:pt x="4316431" y="3483746"/>
-                  </a:lnTo>
-                  <a:lnTo>
-                    <a:pt x="4244808" y="3483746"/>
-                  </a:lnTo>
-                  <a:lnTo>
-                    <a:pt x="4173186" y="3483746"/>
-                  </a:lnTo>
-                  <a:lnTo>
-                    <a:pt x="4101563" y="3483746"/>
-                  </a:lnTo>
-                  <a:lnTo>
-                    <a:pt x="4029941" y="3483746"/>
-                  </a:lnTo>
-                  <a:lnTo>
-                    <a:pt x="3958318" y="3483746"/>
-                  </a:lnTo>
-                  <a:lnTo>
-                    <a:pt x="3886696" y="3483746"/>
-                  </a:lnTo>
-                  <a:lnTo>
-                    <a:pt x="3815073" y="3483746"/>
-                  </a:lnTo>
-                  <a:lnTo>
-                    <a:pt x="3743451" y="3483746"/>
-                  </a:lnTo>
-                  <a:lnTo>
-                    <a:pt x="3671828" y="3483746"/>
-                  </a:lnTo>
-                  <a:lnTo>
-                    <a:pt x="3600206" y="3483746"/>
-                  </a:lnTo>
-                  <a:lnTo>
-                    <a:pt x="3528583" y="3483746"/>
-                  </a:lnTo>
-                  <a:lnTo>
-                    <a:pt x="3456960" y="3483746"/>
-                  </a:lnTo>
-                  <a:lnTo>
-                    <a:pt x="3385338" y="3483746"/>
-                  </a:lnTo>
-                  <a:lnTo>
-                    <a:pt x="3313715" y="3483746"/>
-                  </a:lnTo>
-                  <a:lnTo>
-                    <a:pt x="3242093" y="3483746"/>
-                  </a:lnTo>
-                  <a:lnTo>
-                    <a:pt x="3170470" y="3483746"/>
-                  </a:lnTo>
-                  <a:lnTo>
-                    <a:pt x="3098848" y="3483746"/>
-                  </a:lnTo>
-                  <a:lnTo>
-                    <a:pt x="3027225" y="3483746"/>
-                  </a:lnTo>
-                  <a:lnTo>
-                    <a:pt x="2955603" y="3483746"/>
-                  </a:lnTo>
-                  <a:lnTo>
-                    <a:pt x="2883980" y="3483746"/>
-                  </a:lnTo>
-                  <a:lnTo>
-                    <a:pt x="2812358" y="3483746"/>
-                  </a:lnTo>
-                  <a:lnTo>
-                    <a:pt x="2740735" y="3483746"/>
-                  </a:lnTo>
-                  <a:lnTo>
-                    <a:pt x="2669113" y="3483746"/>
-                  </a:lnTo>
-                  <a:lnTo>
-                    <a:pt x="2597490" y="3483746"/>
-                  </a:lnTo>
-                  <a:lnTo>
-                    <a:pt x="2525868" y="3483745"/>
-                  </a:lnTo>
-                  <a:lnTo>
-                    <a:pt x="2454245" y="3483745"/>
-                  </a:lnTo>
-                  <a:lnTo>
-                    <a:pt x="2382623" y="3483744"/>
-                  </a:lnTo>
-                  <a:lnTo>
-                    <a:pt x="2311000" y="3483742"/>
-                  </a:lnTo>
-                  <a:lnTo>
-                    <a:pt x="2239378" y="3483740"/>
-                  </a:lnTo>
-                  <a:lnTo>
-                    <a:pt x="2167755" y="3483736"/>
-                  </a:lnTo>
-                  <a:lnTo>
-                    <a:pt x="2096132" y="3483731"/>
-                  </a:lnTo>
-                  <a:lnTo>
-                    <a:pt x="2024510" y="3483722"/>
-                  </a:lnTo>
-                  <a:lnTo>
-                    <a:pt x="1952887" y="3483709"/>
-                  </a:lnTo>
-                  <a:lnTo>
-                    <a:pt x="1881265" y="3483689"/>
-                  </a:lnTo>
-                  <a:lnTo>
-                    <a:pt x="1809642" y="3483658"/>
-                  </a:lnTo>
-                  <a:lnTo>
-                    <a:pt x="1738020" y="3483611"/>
-                  </a:lnTo>
-                  <a:lnTo>
-                    <a:pt x="1666397" y="3483538"/>
-                  </a:lnTo>
-                  <a:lnTo>
-                    <a:pt x="1594775" y="3483425"/>
-                  </a:lnTo>
-                  <a:lnTo>
-                    <a:pt x="1523152" y="3483252"/>
-                  </a:lnTo>
-                  <a:lnTo>
-                    <a:pt x="1451530" y="3482985"/>
-                  </a:lnTo>
-                  <a:lnTo>
-                    <a:pt x="1379907" y="3482575"/>
-                  </a:lnTo>
-                  <a:lnTo>
-                    <a:pt x="1308285" y="3481943"/>
-                  </a:lnTo>
-                  <a:lnTo>
-                    <a:pt x="1236662" y="3480970"/>
-                  </a:lnTo>
-                  <a:lnTo>
-                    <a:pt x="1165040" y="3479472"/>
-                  </a:lnTo>
-                  <a:lnTo>
-                    <a:pt x="1093417" y="3477167"/>
-                  </a:lnTo>
-                  <a:lnTo>
-                    <a:pt x="1021795" y="3473619"/>
-                  </a:lnTo>
-                  <a:lnTo>
-                    <a:pt x="950172" y="3468157"/>
-                  </a:lnTo>
-                  <a:lnTo>
-                    <a:pt x="878550" y="3459749"/>
-                  </a:lnTo>
-                  <a:lnTo>
-                    <a:pt x="806927" y="3446807"/>
-                  </a:lnTo>
-                  <a:lnTo>
-                    <a:pt x="735304" y="3426885"/>
-                  </a:lnTo>
-                  <a:lnTo>
-                    <a:pt x="663682" y="3396218"/>
-                  </a:lnTo>
-                  <a:lnTo>
-                    <a:pt x="592059" y="3349012"/>
-                  </a:lnTo>
-                  <a:lnTo>
-                    <a:pt x="520437" y="3276347"/>
-                  </a:lnTo>
-                  <a:lnTo>
-                    <a:pt x="448814" y="3164492"/>
-                  </a:lnTo>
-                  <a:lnTo>
-                    <a:pt x="377192" y="2992312"/>
-                  </a:lnTo>
-                  <a:lnTo>
-                    <a:pt x="305569" y="2727271"/>
-                  </a:lnTo>
-                  <a:lnTo>
-                    <a:pt x="233947" y="2390616"/>
-                  </a:lnTo>
-                  <a:lnTo>
-                    <a:pt x="162324" y="1931020"/>
-                  </a:lnTo>
-                  <a:lnTo>
-                    <a:pt x="90702" y="1278191"/>
-                  </a:lnTo>
-                  <a:lnTo>
-                    <a:pt x="19079" y="350887"/>
+                    <a:pt x="4312686" y="3483746"/>
+                  </a:lnTo>
+                  <a:lnTo>
+                    <a:pt x="4241063" y="3483746"/>
+                  </a:lnTo>
+                  <a:lnTo>
+                    <a:pt x="4169441" y="3483746"/>
+                  </a:lnTo>
+                  <a:lnTo>
+                    <a:pt x="4097818" y="3483746"/>
+                  </a:lnTo>
+                  <a:lnTo>
+                    <a:pt x="4026196" y="3483746"/>
+                  </a:lnTo>
+                  <a:lnTo>
+                    <a:pt x="3954573" y="3483746"/>
+                  </a:lnTo>
+                  <a:lnTo>
+                    <a:pt x="3882951" y="3483746"/>
+                  </a:lnTo>
+                  <a:lnTo>
+                    <a:pt x="3811328" y="3483746"/>
+                  </a:lnTo>
+                  <a:lnTo>
+                    <a:pt x="3739706" y="3483746"/>
+                  </a:lnTo>
+                  <a:lnTo>
+                    <a:pt x="3668083" y="3483746"/>
+                  </a:lnTo>
+                  <a:lnTo>
+                    <a:pt x="3596460" y="3483746"/>
+                  </a:lnTo>
+                  <a:lnTo>
+                    <a:pt x="3524838" y="3483746"/>
+                  </a:lnTo>
+                  <a:lnTo>
+                    <a:pt x="3453215" y="3483746"/>
+                  </a:lnTo>
+                  <a:lnTo>
+                    <a:pt x="3381593" y="3483746"/>
+                  </a:lnTo>
+                  <a:lnTo>
+                    <a:pt x="3309970" y="3483746"/>
+                  </a:lnTo>
+                  <a:lnTo>
+                    <a:pt x="3238348" y="3483746"/>
+                  </a:lnTo>
+                  <a:lnTo>
+                    <a:pt x="3166725" y="3483746"/>
+                  </a:lnTo>
+                  <a:lnTo>
+                    <a:pt x="3095103" y="3483746"/>
+                  </a:lnTo>
+                  <a:lnTo>
+                    <a:pt x="3023480" y="3483746"/>
+                  </a:lnTo>
+                  <a:lnTo>
+                    <a:pt x="2951858" y="3483746"/>
+                  </a:lnTo>
+                  <a:lnTo>
+                    <a:pt x="2880235" y="3483746"/>
+                  </a:lnTo>
+                  <a:lnTo>
+                    <a:pt x="2808613" y="3483746"/>
+                  </a:lnTo>
+                  <a:lnTo>
+                    <a:pt x="2736990" y="3483746"/>
+                  </a:lnTo>
+                  <a:lnTo>
+                    <a:pt x="2665368" y="3483746"/>
+                  </a:lnTo>
+                  <a:lnTo>
+                    <a:pt x="2593745" y="3483746"/>
+                  </a:lnTo>
+                  <a:lnTo>
+                    <a:pt x="2522123" y="3483745"/>
+                  </a:lnTo>
+                  <a:lnTo>
+                    <a:pt x="2450500" y="3483744"/>
+                  </a:lnTo>
+                  <a:lnTo>
+                    <a:pt x="2378878" y="3483743"/>
+                  </a:lnTo>
+                  <a:lnTo>
+                    <a:pt x="2307255" y="3483742"/>
+                  </a:lnTo>
+                  <a:lnTo>
+                    <a:pt x="2235632" y="3483739"/>
+                  </a:lnTo>
+                  <a:lnTo>
+                    <a:pt x="2164010" y="3483736"/>
+                  </a:lnTo>
+                  <a:lnTo>
+                    <a:pt x="2092387" y="3483730"/>
+                  </a:lnTo>
+                  <a:lnTo>
+                    <a:pt x="2020765" y="3483721"/>
+                  </a:lnTo>
+                  <a:lnTo>
+                    <a:pt x="1949142" y="3483707"/>
+                  </a:lnTo>
+                  <a:lnTo>
+                    <a:pt x="1877520" y="3483686"/>
+                  </a:lnTo>
+                  <a:lnTo>
+                    <a:pt x="1805897" y="3483653"/>
+                  </a:lnTo>
+                  <a:lnTo>
+                    <a:pt x="1734275" y="3483603"/>
+                  </a:lnTo>
+                  <a:lnTo>
+                    <a:pt x="1662652" y="3483525"/>
+                  </a:lnTo>
+                  <a:lnTo>
+                    <a:pt x="1591030" y="3483407"/>
+                  </a:lnTo>
+                  <a:lnTo>
+                    <a:pt x="1519407" y="3483224"/>
+                  </a:lnTo>
+                  <a:lnTo>
+                    <a:pt x="1447785" y="3482943"/>
+                  </a:lnTo>
+                  <a:lnTo>
+                    <a:pt x="1376162" y="3482512"/>
+                  </a:lnTo>
+                  <a:lnTo>
+                    <a:pt x="1304540" y="3481848"/>
+                  </a:lnTo>
+                  <a:lnTo>
+                    <a:pt x="1232917" y="3480829"/>
+                  </a:lnTo>
+                  <a:lnTo>
+                    <a:pt x="1161295" y="3479261"/>
+                  </a:lnTo>
+                  <a:lnTo>
+                    <a:pt x="1089672" y="3476852"/>
+                  </a:lnTo>
+                  <a:lnTo>
+                    <a:pt x="1018050" y="3473147"/>
+                  </a:lnTo>
+                  <a:lnTo>
+                    <a:pt x="946427" y="3467453"/>
+                  </a:lnTo>
+                  <a:lnTo>
+                    <a:pt x="874804" y="3458700"/>
+                  </a:lnTo>
+                  <a:lnTo>
+                    <a:pt x="803182" y="3445244"/>
+                  </a:lnTo>
+                  <a:lnTo>
+                    <a:pt x="731559" y="3424560"/>
+                  </a:lnTo>
+                  <a:lnTo>
+                    <a:pt x="659937" y="3392763"/>
+                  </a:lnTo>
+                  <a:lnTo>
+                    <a:pt x="588314" y="3343884"/>
+                  </a:lnTo>
+                  <a:lnTo>
+                    <a:pt x="516692" y="3268745"/>
+                  </a:lnTo>
+                  <a:lnTo>
+                    <a:pt x="445069" y="3153238"/>
+                  </a:lnTo>
+                  <a:lnTo>
+                    <a:pt x="373447" y="2975678"/>
+                  </a:lnTo>
+                  <a:lnTo>
+                    <a:pt x="301824" y="2702727"/>
+                  </a:lnTo>
+                  <a:lnTo>
+                    <a:pt x="230202" y="2363382"/>
+                  </a:lnTo>
+                  <a:lnTo>
+                    <a:pt x="158579" y="1894587"/>
+                  </a:lnTo>
+                  <a:lnTo>
+                    <a:pt x="86957" y="1229632"/>
+                  </a:lnTo>
+                  <a:lnTo>
+                    <a:pt x="15334" y="286439"/>
                   </a:lnTo>
                   <a:lnTo>
                     <a:pt x="0" y="0"/>
@@ -4217,198 +4217,198 @@
           </p:nvSpPr>
           <p:spPr>
             <a:xfrm>
-              <a:off x="3903653" y="2073503"/>
-              <a:ext cx="4359026" cy="3483746"/>
+              <a:off x="3908589" y="2073503"/>
+              <a:ext cx="4354089" cy="3483746"/>
             </a:xfrm>
             <a:custGeom>
               <a:avLst/>
               <a:pathLst>
-                <a:path w="4359026" h="3483746">
+                <a:path w="4354089" h="3483746">
                   <a:moveTo>
                     <a:pt x="0" y="0"/>
                   </a:moveTo>
                   <a:lnTo>
-                    <a:pt x="61674" y="1016854"/>
-                  </a:lnTo>
-                  <a:lnTo>
-                    <a:pt x="133297" y="1815447"/>
-                  </a:lnTo>
-                  <a:lnTo>
-                    <a:pt x="204919" y="2355516"/>
-                  </a:lnTo>
-                  <a:lnTo>
-                    <a:pt x="276542" y="2720751"/>
-                  </a:lnTo>
-                  <a:lnTo>
-                    <a:pt x="348164" y="2967751"/>
-                  </a:lnTo>
-                  <a:lnTo>
-                    <a:pt x="419787" y="3134791"/>
-                  </a:lnTo>
-                  <a:lnTo>
-                    <a:pt x="491409" y="3247756"/>
-                  </a:lnTo>
-                  <a:lnTo>
-                    <a:pt x="563032" y="3324152"/>
-                  </a:lnTo>
-                  <a:lnTo>
-                    <a:pt x="634654" y="3375817"/>
-                  </a:lnTo>
-                  <a:lnTo>
-                    <a:pt x="706277" y="3410756"/>
-                  </a:lnTo>
-                  <a:lnTo>
-                    <a:pt x="777899" y="3434385"/>
-                  </a:lnTo>
-                  <a:lnTo>
-                    <a:pt x="849522" y="3450364"/>
-                  </a:lnTo>
-                  <a:lnTo>
-                    <a:pt x="921145" y="3461171"/>
-                  </a:lnTo>
-                  <a:lnTo>
-                    <a:pt x="992767" y="3468479"/>
-                  </a:lnTo>
-                  <a:lnTo>
-                    <a:pt x="1064390" y="3473422"/>
-                  </a:lnTo>
-                  <a:lnTo>
-                    <a:pt x="1136012" y="3476764"/>
-                  </a:lnTo>
-                  <a:lnTo>
-                    <a:pt x="1207635" y="3479024"/>
-                  </a:lnTo>
-                  <a:lnTo>
-                    <a:pt x="1279257" y="3480553"/>
-                  </a:lnTo>
-                  <a:lnTo>
-                    <a:pt x="1350880" y="3481587"/>
-                  </a:lnTo>
-                  <a:lnTo>
-                    <a:pt x="1422502" y="3482286"/>
-                  </a:lnTo>
-                  <a:lnTo>
-                    <a:pt x="1494125" y="3482759"/>
-                  </a:lnTo>
-                  <a:lnTo>
-                    <a:pt x="1565747" y="3483078"/>
-                  </a:lnTo>
-                  <a:lnTo>
-                    <a:pt x="1637370" y="3483295"/>
-                  </a:lnTo>
-                  <a:lnTo>
-                    <a:pt x="1708992" y="3483441"/>
-                  </a:lnTo>
-                  <a:lnTo>
-                    <a:pt x="1780615" y="3483540"/>
-                  </a:lnTo>
-                  <a:lnTo>
-                    <a:pt x="1852237" y="3483607"/>
-                  </a:lnTo>
-                  <a:lnTo>
-                    <a:pt x="1923860" y="3483652"/>
-                  </a:lnTo>
-                  <a:lnTo>
-                    <a:pt x="1995482" y="3483683"/>
-                  </a:lnTo>
-                  <a:lnTo>
-                    <a:pt x="2067105" y="3483703"/>
-                  </a:lnTo>
-                  <a:lnTo>
-                    <a:pt x="2138727" y="3483717"/>
-                  </a:lnTo>
-                  <a:lnTo>
-                    <a:pt x="2210350" y="3483727"/>
-                  </a:lnTo>
-                  <a:lnTo>
-                    <a:pt x="2281973" y="3483733"/>
-                  </a:lnTo>
-                  <a:lnTo>
-                    <a:pt x="2353595" y="3483737"/>
-                  </a:lnTo>
-                  <a:lnTo>
-                    <a:pt x="2425218" y="3483740"/>
-                  </a:lnTo>
-                  <a:lnTo>
-                    <a:pt x="2496840" y="3483742"/>
-                  </a:lnTo>
-                  <a:lnTo>
-                    <a:pt x="2568463" y="3483744"/>
-                  </a:lnTo>
-                  <a:lnTo>
-                    <a:pt x="2640085" y="3483745"/>
-                  </a:lnTo>
-                  <a:lnTo>
-                    <a:pt x="2711708" y="3483745"/>
-                  </a:lnTo>
-                  <a:lnTo>
-                    <a:pt x="2783330" y="3483746"/>
-                  </a:lnTo>
-                  <a:lnTo>
-                    <a:pt x="2854953" y="3483746"/>
-                  </a:lnTo>
-                  <a:lnTo>
-                    <a:pt x="2926575" y="3483746"/>
-                  </a:lnTo>
-                  <a:lnTo>
-                    <a:pt x="2998198" y="3483746"/>
-                  </a:lnTo>
-                  <a:lnTo>
-                    <a:pt x="3069820" y="3483746"/>
-                  </a:lnTo>
-                  <a:lnTo>
-                    <a:pt x="3141443" y="3483746"/>
-                  </a:lnTo>
-                  <a:lnTo>
-                    <a:pt x="3213065" y="3483746"/>
-                  </a:lnTo>
-                  <a:lnTo>
-                    <a:pt x="3284688" y="3483746"/>
-                  </a:lnTo>
-                  <a:lnTo>
-                    <a:pt x="3356310" y="3483746"/>
-                  </a:lnTo>
-                  <a:lnTo>
-                    <a:pt x="3427933" y="3483746"/>
-                  </a:lnTo>
-                  <a:lnTo>
-                    <a:pt x="3499555" y="3483746"/>
-                  </a:lnTo>
-                  <a:lnTo>
-                    <a:pt x="3571178" y="3483746"/>
-                  </a:lnTo>
-                  <a:lnTo>
-                    <a:pt x="3642801" y="3483746"/>
-                  </a:lnTo>
-                  <a:lnTo>
-                    <a:pt x="3714423" y="3483746"/>
-                  </a:lnTo>
-                  <a:lnTo>
-                    <a:pt x="3786046" y="3483746"/>
-                  </a:lnTo>
-                  <a:lnTo>
-                    <a:pt x="3857668" y="3483746"/>
-                  </a:lnTo>
-                  <a:lnTo>
-                    <a:pt x="3929291" y="3483746"/>
-                  </a:lnTo>
-                  <a:lnTo>
-                    <a:pt x="4000913" y="3483746"/>
-                  </a:lnTo>
-                  <a:lnTo>
-                    <a:pt x="4072536" y="3483746"/>
-                  </a:lnTo>
-                  <a:lnTo>
-                    <a:pt x="4144158" y="3483746"/>
-                  </a:lnTo>
-                  <a:lnTo>
-                    <a:pt x="4215781" y="3483746"/>
-                  </a:lnTo>
-                  <a:lnTo>
-                    <a:pt x="4287403" y="3483746"/>
-                  </a:lnTo>
-                  <a:lnTo>
-                    <a:pt x="4359026" y="3483746"/>
+                    <a:pt x="56737" y="954863"/>
+                  </a:lnTo>
+                  <a:lnTo>
+                    <a:pt x="128360" y="1771152"/>
+                  </a:lnTo>
+                  <a:lnTo>
+                    <a:pt x="199982" y="2323954"/>
+                  </a:lnTo>
+                  <a:lnTo>
+                    <a:pt x="271605" y="2698319"/>
+                  </a:lnTo>
+                  <a:lnTo>
+                    <a:pt x="343227" y="2951844"/>
+                  </a:lnTo>
+                  <a:lnTo>
+                    <a:pt x="414850" y="3123535"/>
+                  </a:lnTo>
+                  <a:lnTo>
+                    <a:pt x="486473" y="3239806"/>
+                  </a:lnTo>
+                  <a:lnTo>
+                    <a:pt x="558095" y="3318547"/>
+                  </a:lnTo>
+                  <a:lnTo>
+                    <a:pt x="629718" y="3371871"/>
+                  </a:lnTo>
+                  <a:lnTo>
+                    <a:pt x="701340" y="3407983"/>
+                  </a:lnTo>
+                  <a:lnTo>
+                    <a:pt x="772963" y="3432438"/>
+                  </a:lnTo>
+                  <a:lnTo>
+                    <a:pt x="844585" y="3449000"/>
+                  </a:lnTo>
+                  <a:lnTo>
+                    <a:pt x="916208" y="3460215"/>
+                  </a:lnTo>
+                  <a:lnTo>
+                    <a:pt x="987830" y="3467811"/>
+                  </a:lnTo>
+                  <a:lnTo>
+                    <a:pt x="1059453" y="3472955"/>
+                  </a:lnTo>
+                  <a:lnTo>
+                    <a:pt x="1131075" y="3476438"/>
+                  </a:lnTo>
+                  <a:lnTo>
+                    <a:pt x="1202698" y="3478797"/>
+                  </a:lnTo>
+                  <a:lnTo>
+                    <a:pt x="1274320" y="3480395"/>
+                  </a:lnTo>
+                  <a:lnTo>
+                    <a:pt x="1345943" y="3481477"/>
+                  </a:lnTo>
+                  <a:lnTo>
+                    <a:pt x="1417565" y="3482209"/>
+                  </a:lnTo>
+                  <a:lnTo>
+                    <a:pt x="1489188" y="3482705"/>
+                  </a:lnTo>
+                  <a:lnTo>
+                    <a:pt x="1560810" y="3483041"/>
+                  </a:lnTo>
+                  <a:lnTo>
+                    <a:pt x="1632433" y="3483269"/>
+                  </a:lnTo>
+                  <a:lnTo>
+                    <a:pt x="1704055" y="3483423"/>
+                  </a:lnTo>
+                  <a:lnTo>
+                    <a:pt x="1775678" y="3483527"/>
+                  </a:lnTo>
+                  <a:lnTo>
+                    <a:pt x="1847301" y="3483598"/>
+                  </a:lnTo>
+                  <a:lnTo>
+                    <a:pt x="1918923" y="3483646"/>
+                  </a:lnTo>
+                  <a:lnTo>
+                    <a:pt x="1990546" y="3483678"/>
+                  </a:lnTo>
+                  <a:lnTo>
+                    <a:pt x="2062168" y="3483700"/>
+                  </a:lnTo>
+                  <a:lnTo>
+                    <a:pt x="2133791" y="3483715"/>
+                  </a:lnTo>
+                  <a:lnTo>
+                    <a:pt x="2205413" y="3483725"/>
+                  </a:lnTo>
+                  <a:lnTo>
+                    <a:pt x="2277036" y="3483732"/>
+                  </a:lnTo>
+                  <a:lnTo>
+                    <a:pt x="2348658" y="3483737"/>
+                  </a:lnTo>
+                  <a:lnTo>
+                    <a:pt x="2420281" y="3483740"/>
+                  </a:lnTo>
+                  <a:lnTo>
+                    <a:pt x="2491903" y="3483742"/>
+                  </a:lnTo>
+                  <a:lnTo>
+                    <a:pt x="2563526" y="3483743"/>
+                  </a:lnTo>
+                  <a:lnTo>
+                    <a:pt x="2635148" y="3483744"/>
+                  </a:lnTo>
+                  <a:lnTo>
+                    <a:pt x="2706771" y="3483745"/>
+                  </a:lnTo>
+                  <a:lnTo>
+                    <a:pt x="2778393" y="3483745"/>
+                  </a:lnTo>
+                  <a:lnTo>
+                    <a:pt x="2850016" y="3483746"/>
+                  </a:lnTo>
+                  <a:lnTo>
+                    <a:pt x="2921638" y="3483746"/>
+                  </a:lnTo>
+                  <a:lnTo>
+                    <a:pt x="2993261" y="3483746"/>
+                  </a:lnTo>
+                  <a:lnTo>
+                    <a:pt x="3064883" y="3483746"/>
+                  </a:lnTo>
+                  <a:lnTo>
+                    <a:pt x="3136506" y="3483746"/>
+                  </a:lnTo>
+                  <a:lnTo>
+                    <a:pt x="3208129" y="3483746"/>
+                  </a:lnTo>
+                  <a:lnTo>
+                    <a:pt x="3279751" y="3483746"/>
+                  </a:lnTo>
+                  <a:lnTo>
+                    <a:pt x="3351374" y="3483746"/>
+                  </a:lnTo>
+                  <a:lnTo>
+                    <a:pt x="3422996" y="3483746"/>
+                  </a:lnTo>
+                  <a:lnTo>
+                    <a:pt x="3494619" y="3483746"/>
+                  </a:lnTo>
+                  <a:lnTo>
+                    <a:pt x="3566241" y="3483746"/>
+                  </a:lnTo>
+                  <a:lnTo>
+                    <a:pt x="3637864" y="3483746"/>
+                  </a:lnTo>
+                  <a:lnTo>
+                    <a:pt x="3709486" y="3483746"/>
+                  </a:lnTo>
+                  <a:lnTo>
+                    <a:pt x="3781109" y="3483746"/>
+                  </a:lnTo>
+                  <a:lnTo>
+                    <a:pt x="3852731" y="3483746"/>
+                  </a:lnTo>
+                  <a:lnTo>
+                    <a:pt x="3924354" y="3483746"/>
+                  </a:lnTo>
+                  <a:lnTo>
+                    <a:pt x="3995976" y="3483746"/>
+                  </a:lnTo>
+                  <a:lnTo>
+                    <a:pt x="4067599" y="3483746"/>
+                  </a:lnTo>
+                  <a:lnTo>
+                    <a:pt x="4139221" y="3483746"/>
+                  </a:lnTo>
+                  <a:lnTo>
+                    <a:pt x="4210844" y="3483746"/>
+                  </a:lnTo>
+                  <a:lnTo>
+                    <a:pt x="4282466" y="3483746"/>
+                  </a:lnTo>
+                  <a:lnTo>
+                    <a:pt x="4354089" y="3483746"/>
                   </a:lnTo>
                 </a:path>
               </a:pathLst>
@@ -4480,7 +4480,7 @@
           </p:nvSpPr>
           <p:spPr>
             <a:xfrm>
-              <a:off x="4164901" y="2073503"/>
+              <a:off x="4170171" y="2073503"/>
               <a:ext cx="0" cy="3649639"/>
             </a:xfrm>
             <a:custGeom>
@@ -4753,7 +4753,7 @@
           </p:nvSpPr>
           <p:spPr>
             <a:xfrm>
-              <a:off x="1382692" y="5785772"/>
+              <a:off x="1383511" y="5785772"/>
               <a:ext cx="161574" cy="80101"/>
             </a:xfrm>
             <a:prstGeom prst="rect">
@@ -4799,7 +4799,7 @@
           </p:nvSpPr>
           <p:spPr>
             <a:xfrm>
-              <a:off x="2284877" y="5785772"/>
+              <a:off x="2285456" y="5785772"/>
               <a:ext cx="161574" cy="80101"/>
             </a:xfrm>
             <a:prstGeom prst="rect">
@@ -4845,7 +4845,7 @@
           </p:nvSpPr>
           <p:spPr>
             <a:xfrm>
-              <a:off x="3187061" y="5785772"/>
+              <a:off x="3187401" y="5785772"/>
               <a:ext cx="161574" cy="80101"/>
             </a:xfrm>
             <a:prstGeom prst="rect">
@@ -4891,7 +4891,7 @@
           </p:nvSpPr>
           <p:spPr>
             <a:xfrm>
-              <a:off x="4138944" y="5785772"/>
+              <a:off x="4139043" y="5785772"/>
               <a:ext cx="62179" cy="80101"/>
             </a:xfrm>
             <a:prstGeom prst="rect">
@@ -4937,7 +4937,7 @@
           </p:nvSpPr>
           <p:spPr>
             <a:xfrm>
-              <a:off x="5010039" y="5785772"/>
+              <a:off x="5009898" y="5785772"/>
               <a:ext cx="124358" cy="80101"/>
             </a:xfrm>
             <a:prstGeom prst="rect">
@@ -4983,7 +4983,7 @@
           </p:nvSpPr>
           <p:spPr>
             <a:xfrm>
-              <a:off x="5912223" y="5785772"/>
+              <a:off x="5911843" y="5785772"/>
               <a:ext cx="124358" cy="80101"/>
             </a:xfrm>
             <a:prstGeom prst="rect">
@@ -5029,7 +5029,7 @@
           </p:nvSpPr>
           <p:spPr>
             <a:xfrm>
-              <a:off x="6814408" y="5785772"/>
+              <a:off x="6813788" y="5785772"/>
               <a:ext cx="124358" cy="80101"/>
             </a:xfrm>
             <a:prstGeom prst="rect">
@@ -5075,7 +5075,7 @@
           </p:nvSpPr>
           <p:spPr>
             <a:xfrm>
-              <a:off x="7716592" y="5785772"/>
+              <a:off x="7715733" y="5785772"/>
               <a:ext cx="124358" cy="80101"/>
             </a:xfrm>
             <a:prstGeom prst="rect">
@@ -5246,7 +5246,7 @@
                   <a:latin typeface="Helvetica"/>
                   <a:cs typeface="Helvetica"/>
                 </a:rPr>
-                <a:t>subHR per 10 % decline: 137.98 (83.17-228.91), p = &lt;0.001  |  per IQR decline (Δ = 27.4 %): 746729.11 (186103.26-2996209.58)  |  IQR: [-12.6, 14.8] %</a:t>
+                <a:t>subHR per 10 % decline: 135.42 (81.61-224.71), p = &lt;0.001  |  per IQR decline (Δ = 27.2 %): 633510.36 (159634.72-2514085.75)  |  IQR: [-12.3, 14.9] %</a:t>
               </a:r>
             </a:p>
           </p:txBody>
